--- a/tools/rcn-graph-composer-intro.pptx
+++ b/tools/rcn-graph-composer-intro.pptx
@@ -10,6 +10,8 @@
     <p:sldId id="258" r:id="rId9"/>
     <p:sldId id="259" r:id="rId10"/>
     <p:sldId id="260" r:id="rId11"/>
+    <p:sldId id="268" r:id="rId19"/>
+    <p:sldId id="269" r:id="rId20"/>
     <p:sldId id="261" r:id="rId12"/>
     <p:sldId id="262" r:id="rId13"/>
     <p:sldId id="263" r:id="rId14"/>
@@ -3250,58 +3252,14 @@
       <p:grpSpPr/>
       <p:sp>
         <p:nvSpPr>
-          <p:cNvPr id="2" name="Rectangle 1"/>
-          <p:cNvSpPr/>
-          <p:nvPr/>
-        </p:nvSpPr>
-        <p:spPr>
-          <a:xfrm>
-            <a:off x="0" y="0"/>
-            <a:ext cx="12191695" cy="6858000"/>
-          </a:xfrm>
-          <a:prstGeom prst="rect">
-            <a:avLst/>
-          </a:prstGeom>
-          <a:solidFill>
-            <a:srgbClr val="0F172A"/>
-          </a:solidFill>
-          <a:ln>
-            <a:noFill/>
-          </a:ln>
-          <a:effectLst/>
-        </p:spPr>
-        <p:style>
-          <a:lnRef idx="1">
-            <a:schemeClr val="accent1"/>
-          </a:lnRef>
-          <a:fillRef idx="3">
-            <a:schemeClr val="accent1"/>
-          </a:fillRef>
-          <a:effectRef idx="2">
-            <a:schemeClr val="accent1"/>
-          </a:effectRef>
-          <a:fontRef idx="minor">
-            <a:schemeClr val="lt1"/>
-          </a:fontRef>
-        </p:style>
-        <p:txBody>
-          <a:bodyPr rtlCol="0" anchor="ctr"/>
-          <a:lstStyle/>
-          <a:p>
-            <a:pPr algn="ctr"/>
-          </a:p>
-        </p:txBody>
-      </p:sp>
-      <p:sp>
-        <p:nvSpPr>
-          <p:cNvPr id="3" name="TextBox 2"/>
+          <p:cNvPr id="2" name="TextBox 1"/>
           <p:cNvSpPr txBox="1"/>
           <p:nvPr/>
         </p:nvSpPr>
         <p:spPr>
           <a:xfrm>
-            <a:off x="1005840" y="2103120"/>
-            <a:ext cx="10149840" cy="2926080"/>
+            <a:off x="822960" y="548640"/>
+            <a:ext cx="10515600" cy="1097280"/>
           </a:xfrm>
           <a:prstGeom prst="rect">
             <a:avLst/>
@@ -3316,17 +3274,72 @@
           <a:p>
             <a:pPr>
               <a:spcAft>
-                <a:spcPts val="1800"/>
-              </a:spcAft>
-              <a:defRPr sz="4400" b="1">
-                <a:solidFill>
-                  <a:srgbClr val="FFFFFF"/>
-                </a:solidFill>
-                <a:latin typeface="Helvetica Neue"/>
-              </a:defRPr>
-            </a:pPr>
-            <a:r>
-              <a:t>No wiki required.</a:t>
+                <a:spcPts val="600"/>
+              </a:spcAft>
+              <a:defRPr sz="3400" b="1">
+                <a:solidFill>
+                  <a:srgbClr val="0F172A"/>
+                </a:solidFill>
+                <a:latin typeface="Helvetica Neue"/>
+              </a:defRPr>
+            </a:pPr>
+            <a:r>
+              <a:t>Worked example — the EIP schema</a:t>
+            </a:r>
+          </a:p>
+          <a:p>
+            <a:pPr>
+              <a:spcAft>
+                <a:spcPts val="0"/>
+              </a:spcAft>
+              <a:defRPr sz="1600" b="0">
+                <a:solidFill>
+                  <a:srgbClr val="64748B"/>
+                </a:solidFill>
+                <a:latin typeface="Helvetica Neue"/>
+              </a:defRPr>
+            </a:pPr>
+            <a:r>
+              <a:t>Sixteen curated aspect files. Two to eight nodes each.</a:t>
+            </a:r>
+          </a:p>
+        </p:txBody>
+      </p:sp>
+      <p:sp>
+        <p:nvSpPr>
+          <p:cNvPr id="3" name="TextBox 2"/>
+          <p:cNvSpPr txBox="1"/>
+          <p:nvPr/>
+        </p:nvSpPr>
+        <p:spPr>
+          <a:xfrm>
+            <a:off x="822960" y="1965960"/>
+            <a:ext cx="10515600" cy="4023360"/>
+          </a:xfrm>
+          <a:prstGeom prst="rect">
+            <a:avLst/>
+          </a:prstGeom>
+          <a:noFill/>
+        </p:spPr>
+        <p:txBody>
+          <a:bodyPr wrap="square">
+            <a:spAutoFit/>
+          </a:bodyPr>
+          <a:lstStyle/>
+          <a:p>
+            <a:pPr>
+              <a:spcAft>
+                <a:spcPts val="400"/>
+              </a:spcAft>
+              <a:defRPr sz="2000" b="1">
+                <a:solidFill>
+                  <a:srgbClr val="334155"/>
+                </a:solidFill>
+                <a:latin typeface="Helvetica Neue"/>
+              </a:defRPr>
+            </a:pPr>
+            <a:r>
+              <a:t>75 source nodes → 25 at variable level, 24 at schema, 8 families. One drawing, three grains.</a:t>
             </a:r>
           </a:p>
           <a:p>
@@ -3334,31 +3347,118 @@
               <a:spcAft>
                 <a:spcPts val="1600"/>
               </a:spcAft>
-              <a:defRPr sz="2200" b="0">
-                <a:solidFill>
-                  <a:srgbClr val="CBD5E1"/>
-                </a:solidFill>
-                <a:latin typeface="Helvetica Neue"/>
-              </a:defRPr>
-            </a:pPr>
-            <a:r>
-              <a:t>The schema labels live in the files. A FedWiki roster is one convenient way to look standard names up — it is not the price of entry.</a:t>
-            </a:r>
-          </a:p>
+              <a:defRPr sz="1500" b="0">
+                <a:solidFill>
+                  <a:srgbClr val="64748B"/>
+                </a:solidFill>
+                <a:latin typeface="Helvetica Neue"/>
+              </a:defRPr>
+            </a:pPr>
+            <a:r>
+              <a:t>No duplicates. 50 nodes recognised as repeats of ones already present.</a:t>
+            </a:r>
+          </a:p>
+          <a:p>
+            <a:pPr>
+              <a:spcAft>
+                <a:spcPts val="400"/>
+              </a:spcAft>
+              <a:defRPr sz="2000" b="1">
+                <a:solidFill>
+                  <a:srgbClr val="334155"/>
+                </a:solidFill>
+                <a:latin typeface="Helvetica Neue"/>
+              </a:defRPr>
+            </a:pPr>
+            <a:r>
+              <a:t>And it surfaced a disagreement worth having.</a:t>
+            </a:r>
+          </a:p>
+          <a:p>
+            <a:pPr>
+              <a:spcAft>
+                <a:spcPts val="1600"/>
+              </a:spcAft>
+              <a:defRPr sz="1500" b="0">
+                <a:solidFill>
+                  <a:srgbClr val="64748B"/>
+                </a:solidFill>
+                <a:latin typeface="Helvetica Neue"/>
+              </a:defRPr>
+            </a:pPr>
+            <a:r>
+              <a:t>Person–experience→Motivation. Place–support→Person. Person–make→Commitment.</a:t>
+            </a:r>
+          </a:p>
+          <a:p>
+            <a:pPr>
+              <a:spcAft>
+                <a:spcPts val="400"/>
+              </a:spcAft>
+              <a:defRPr sz="2000" b="1">
+                <a:solidFill>
+                  <a:srgbClr val="334155"/>
+                </a:solidFill>
+                <a:latin typeface="Helvetica Neue"/>
+              </a:defRPr>
+            </a:pPr>
+            <a:r>
+              <a:t>Three of those exist in the finished CLD too — pointing the OTHER way.</a:t>
+            </a:r>
+          </a:p>
+          <a:p>
+            <a:pPr>
+              <a:spcAft>
+                <a:spcPts val="1600"/>
+              </a:spcAft>
+              <a:defRPr sz="1500" b="0">
+                <a:solidFill>
+                  <a:srgbClr val="64748B"/>
+                </a:solidFill>
+                <a:latin typeface="Helvetica Neue"/>
+              </a:defRPr>
+            </a:pPr>
+            <a:r>
+              <a:t>In a causal-loop diagram, direction decides which feedback loops exist.</a:t>
+            </a:r>
+          </a:p>
+        </p:txBody>
+      </p:sp>
+      <p:sp>
+        <p:nvSpPr>
+          <p:cNvPr id="4" name="TextBox 3"/>
+          <p:cNvSpPr txBox="1"/>
+          <p:nvPr/>
+        </p:nvSpPr>
+        <p:spPr>
+          <a:xfrm>
+            <a:off x="822960" y="5989320"/>
+            <a:ext cx="10515600" cy="548640"/>
+          </a:xfrm>
+          <a:prstGeom prst="rect">
+            <a:avLst/>
+          </a:prstGeom>
+          <a:noFill/>
+        </p:spPr>
+        <p:txBody>
+          <a:bodyPr wrap="square">
+            <a:spAutoFit/>
+          </a:bodyPr>
+          <a:lstStyle/>
           <a:p>
             <a:pPr>
               <a:spcAft>
                 <a:spcPts val="0"/>
               </a:spcAft>
-              <a:defRPr sz="1800" b="1">
-                <a:solidFill>
-                  <a:srgbClr val="93C5FD"/>
-                </a:solidFill>
-                <a:latin typeface="Helvetica Neue"/>
-              </a:defRPr>
-            </a:pPr>
-            <a:r>
-              <a:t>A folder of JSON files works exactly as well.</a:t>
+              <a:defRPr sz="1300" b="1">
+                <a:solidFill>
+                  <a:srgbClr val="8A6A2E"/>
+                </a:solidFill>
+                <a:latin typeface="Helvetica Neue"/>
+              </a:defRPr>
+            </a:pPr>
+            <a:r>
+              <a:t>31 such disagreements catalogued. Neither source wins automatically — a human call, still open.</a:t>
             </a:r>
           </a:p>
         </p:txBody>
@@ -3415,7 +3515,7 @@
               </a:defRPr>
             </a:pPr>
             <a:r>
-              <a:t>Composer or Graph Tool?</a:t>
+              <a:t>Where it came from</a:t>
             </a:r>
           </a:p>
           <a:p>
@@ -3431,7 +3531,7 @@
               </a:defRPr>
             </a:pPr>
             <a:r>
-              <a:t>Different verbs, deliberately kept apart.</a:t>
+              <a:t>Ward Cunningham's Solo Super Collaborator — public, live, and findable.</a:t>
             </a:r>
           </a:p>
         </p:txBody>
@@ -3470,7 +3570,7 @@
               </a:defRPr>
             </a:pPr>
             <a:r>
-              <a:t>Graph Tool — authoring ONE graph.</a:t>
+              <a:t>wardcunningham.github.io/graph/graph.js</a:t>
             </a:r>
           </a:p>
           <a:p>
@@ -3486,7 +3586,7 @@
               </a:defRPr>
             </a:pPr>
             <a:r>
-              <a:t>Modes, layouts, icons, legend-as-registry, CLD loops, exports. 5,300 lines.</a:t>
+              <a:t>His Graph class. addUniqNode() carries the same merge rule. clusters() is our Partition.</a:t>
             </a:r>
           </a:p>
           <a:p>
@@ -3502,7 +3602,7 @@
               </a:defRPr>
             </a:pPr>
             <a:r>
-              <a:t>Composer — assembling MANY graphs.</a:t>
+              <a:t>WardCunningham/assets · pages/mock-graph-data/</a:t>
             </a:r>
           </a:p>
           <a:p>
@@ -3518,7 +3618,7 @@
               </a:defRPr>
             </a:pPr>
             <a:r>
-              <a:t>Beam, merge, bridge, partition. Deliberately small.</a:t>
+              <a:t>37 files. creator.html and composite.html are the originals.</a:t>
             </a:r>
           </a:p>
           <a:p>
@@ -3534,7 +3634,7 @@
               </a:defRPr>
             </a:pPr>
             <a:r>
-              <a:t>They share a file format.</a:t>
+              <a:t>paul90/wiki-plugin-solo</a:t>
             </a:r>
           </a:p>
           <a:p>
@@ -3550,7 +3650,46 @@
               </a:defRPr>
             </a:pPr>
             <a:r>
-              <a:t>Draw the pieces → assemble → export → dress for an audience.</a:t>
+              <a:t>The solo item — the lineup popup the live pipeline posts into.</a:t>
+            </a:r>
+          </a:p>
+        </p:txBody>
+      </p:sp>
+      <p:sp>
+        <p:nvSpPr>
+          <p:cNvPr id="4" name="TextBox 3"/>
+          <p:cNvSpPr txBox="1"/>
+          <p:nvPr/>
+        </p:nvSpPr>
+        <p:spPr>
+          <a:xfrm>
+            <a:off x="822960" y="5989320"/>
+            <a:ext cx="10515600" cy="548640"/>
+          </a:xfrm>
+          <a:prstGeom prst="rect">
+            <a:avLst/>
+          </a:prstGeom>
+          <a:noFill/>
+        </p:spPr>
+        <p:txBody>
+          <a:bodyPr wrap="square">
+            <a:spAutoFit/>
+          </a:bodyPr>
+          <a:lstStyle/>
+          <a:p>
+            <a:pPr>
+              <a:spcAft>
+                <a:spcPts val="0"/>
+              </a:spcAft>
+              <a:defRPr sz="1300" b="1">
+                <a:solidFill>
+                  <a:srgbClr val="8A6A2E"/>
+                </a:solidFill>
+                <a:latin typeface="Helvetica Neue"/>
+              </a:defRPr>
+            </a:pPr>
+            <a:r>
+              <a:t>Not yet borrowed: Ward resolves names against the roster, binding identity to a real federated page.</a:t>
             </a:r>
           </a:p>
         </p:txBody>
@@ -3625,6 +3764,331 @@
         </p:nvSpPr>
         <p:spPr>
           <a:xfrm>
+            <a:off x="1005840" y="2103120"/>
+            <a:ext cx="10149840" cy="2926080"/>
+          </a:xfrm>
+          <a:prstGeom prst="rect">
+            <a:avLst/>
+          </a:prstGeom>
+          <a:noFill/>
+        </p:spPr>
+        <p:txBody>
+          <a:bodyPr wrap="square">
+            <a:spAutoFit/>
+          </a:bodyPr>
+          <a:lstStyle/>
+          <a:p>
+            <a:pPr>
+              <a:spcAft>
+                <a:spcPts val="1800"/>
+              </a:spcAft>
+              <a:defRPr sz="4400" b="1">
+                <a:solidFill>
+                  <a:srgbClr val="FFFFFF"/>
+                </a:solidFill>
+                <a:latin typeface="Helvetica Neue"/>
+              </a:defRPr>
+            </a:pPr>
+            <a:r>
+              <a:t>No wiki required.</a:t>
+            </a:r>
+          </a:p>
+          <a:p>
+            <a:pPr>
+              <a:spcAft>
+                <a:spcPts val="1600"/>
+              </a:spcAft>
+              <a:defRPr sz="2200" b="0">
+                <a:solidFill>
+                  <a:srgbClr val="CBD5E1"/>
+                </a:solidFill>
+                <a:latin typeface="Helvetica Neue"/>
+              </a:defRPr>
+            </a:pPr>
+            <a:r>
+              <a:t>The schema labels live in the files. A FedWiki roster is one convenient way to look standard names up — it is not the price of entry.</a:t>
+            </a:r>
+          </a:p>
+          <a:p>
+            <a:pPr>
+              <a:spcAft>
+                <a:spcPts val="0"/>
+              </a:spcAft>
+              <a:defRPr sz="1800" b="1">
+                <a:solidFill>
+                  <a:srgbClr val="93C5FD"/>
+                </a:solidFill>
+                <a:latin typeface="Helvetica Neue"/>
+              </a:defRPr>
+            </a:pPr>
+            <a:r>
+              <a:t>A folder of JSON files works exactly as well.</a:t>
+            </a:r>
+          </a:p>
+        </p:txBody>
+      </p:sp>
+    </p:spTree>
+  </p:cSld>
+  <p:clrMapOvr>
+    <a:masterClrMapping/>
+  </p:clrMapOvr>
+</p:sld>
+</file>
+
+<file path=ppt/slides/slide13.xml><?xml version="1.0" encoding="utf-8"?>
+<p:sld xmlns:a="http://schemas.openxmlformats.org/drawingml/2006/main" xmlns:p="http://schemas.openxmlformats.org/presentationml/2006/main" xmlns:r="http://schemas.openxmlformats.org/officeDocument/2006/relationships">
+  <p:cSld>
+    <p:spTree>
+      <p:nvGrpSpPr>
+        <p:cNvPr id="1" name=""/>
+        <p:cNvGrpSpPr/>
+        <p:nvPr/>
+      </p:nvGrpSpPr>
+      <p:grpSpPr/>
+      <p:sp>
+        <p:nvSpPr>
+          <p:cNvPr id="2" name="TextBox 1"/>
+          <p:cNvSpPr txBox="1"/>
+          <p:nvPr/>
+        </p:nvSpPr>
+        <p:spPr>
+          <a:xfrm>
+            <a:off x="822960" y="548640"/>
+            <a:ext cx="10515600" cy="1097280"/>
+          </a:xfrm>
+          <a:prstGeom prst="rect">
+            <a:avLst/>
+          </a:prstGeom>
+          <a:noFill/>
+        </p:spPr>
+        <p:txBody>
+          <a:bodyPr wrap="square">
+            <a:spAutoFit/>
+          </a:bodyPr>
+          <a:lstStyle/>
+          <a:p>
+            <a:pPr>
+              <a:spcAft>
+                <a:spcPts val="600"/>
+              </a:spcAft>
+              <a:defRPr sz="3400" b="1">
+                <a:solidFill>
+                  <a:srgbClr val="0F172A"/>
+                </a:solidFill>
+                <a:latin typeface="Helvetica Neue"/>
+              </a:defRPr>
+            </a:pPr>
+            <a:r>
+              <a:t>Composer or Graph Tool?</a:t>
+            </a:r>
+          </a:p>
+          <a:p>
+            <a:pPr>
+              <a:spcAft>
+                <a:spcPts val="0"/>
+              </a:spcAft>
+              <a:defRPr sz="1600" b="0">
+                <a:solidFill>
+                  <a:srgbClr val="64748B"/>
+                </a:solidFill>
+                <a:latin typeface="Helvetica Neue"/>
+              </a:defRPr>
+            </a:pPr>
+            <a:r>
+              <a:t>Different verbs, deliberately kept apart.</a:t>
+            </a:r>
+          </a:p>
+        </p:txBody>
+      </p:sp>
+      <p:sp>
+        <p:nvSpPr>
+          <p:cNvPr id="3" name="TextBox 2"/>
+          <p:cNvSpPr txBox="1"/>
+          <p:nvPr/>
+        </p:nvSpPr>
+        <p:spPr>
+          <a:xfrm>
+            <a:off x="822960" y="1965960"/>
+            <a:ext cx="10515600" cy="4023360"/>
+          </a:xfrm>
+          <a:prstGeom prst="rect">
+            <a:avLst/>
+          </a:prstGeom>
+          <a:noFill/>
+        </p:spPr>
+        <p:txBody>
+          <a:bodyPr wrap="square">
+            <a:spAutoFit/>
+          </a:bodyPr>
+          <a:lstStyle/>
+          <a:p>
+            <a:pPr>
+              <a:spcAft>
+                <a:spcPts val="400"/>
+              </a:spcAft>
+              <a:defRPr sz="2000" b="1">
+                <a:solidFill>
+                  <a:srgbClr val="334155"/>
+                </a:solidFill>
+                <a:latin typeface="Helvetica Neue"/>
+              </a:defRPr>
+            </a:pPr>
+            <a:r>
+              <a:t>Graph Tool — authoring ONE graph.</a:t>
+            </a:r>
+          </a:p>
+          <a:p>
+            <a:pPr>
+              <a:spcAft>
+                <a:spcPts val="1600"/>
+              </a:spcAft>
+              <a:defRPr sz="1500" b="0">
+                <a:solidFill>
+                  <a:srgbClr val="64748B"/>
+                </a:solidFill>
+                <a:latin typeface="Helvetica Neue"/>
+              </a:defRPr>
+            </a:pPr>
+            <a:r>
+              <a:t>Modes, layouts, icons, legend-as-registry, CLD loops, exports. 5,300 lines.</a:t>
+            </a:r>
+          </a:p>
+          <a:p>
+            <a:pPr>
+              <a:spcAft>
+                <a:spcPts val="400"/>
+              </a:spcAft>
+              <a:defRPr sz="2000" b="1">
+                <a:solidFill>
+                  <a:srgbClr val="334155"/>
+                </a:solidFill>
+                <a:latin typeface="Helvetica Neue"/>
+              </a:defRPr>
+            </a:pPr>
+            <a:r>
+              <a:t>Composer — assembling MANY graphs.</a:t>
+            </a:r>
+          </a:p>
+          <a:p>
+            <a:pPr>
+              <a:spcAft>
+                <a:spcPts val="1600"/>
+              </a:spcAft>
+              <a:defRPr sz="1500" b="0">
+                <a:solidFill>
+                  <a:srgbClr val="64748B"/>
+                </a:solidFill>
+                <a:latin typeface="Helvetica Neue"/>
+              </a:defRPr>
+            </a:pPr>
+            <a:r>
+              <a:t>Beam, merge, bridge, partition. Deliberately small.</a:t>
+            </a:r>
+          </a:p>
+          <a:p>
+            <a:pPr>
+              <a:spcAft>
+                <a:spcPts val="400"/>
+              </a:spcAft>
+              <a:defRPr sz="2000" b="1">
+                <a:solidFill>
+                  <a:srgbClr val="334155"/>
+                </a:solidFill>
+                <a:latin typeface="Helvetica Neue"/>
+              </a:defRPr>
+            </a:pPr>
+            <a:r>
+              <a:t>They share a file format.</a:t>
+            </a:r>
+          </a:p>
+          <a:p>
+            <a:pPr>
+              <a:spcAft>
+                <a:spcPts val="1600"/>
+              </a:spcAft>
+              <a:defRPr sz="1500" b="0">
+                <a:solidFill>
+                  <a:srgbClr val="64748B"/>
+                </a:solidFill>
+                <a:latin typeface="Helvetica Neue"/>
+              </a:defRPr>
+            </a:pPr>
+            <a:r>
+              <a:t>Draw the pieces → assemble → export → dress for an audience.</a:t>
+            </a:r>
+          </a:p>
+        </p:txBody>
+      </p:sp>
+    </p:spTree>
+  </p:cSld>
+  <p:clrMapOvr>
+    <a:masterClrMapping/>
+  </p:clrMapOvr>
+</p:sld>
+</file>
+
+<file path=ppt/slides/slide14.xml><?xml version="1.0" encoding="utf-8"?>
+<p:sld xmlns:a="http://schemas.openxmlformats.org/drawingml/2006/main" xmlns:p="http://schemas.openxmlformats.org/presentationml/2006/main" xmlns:r="http://schemas.openxmlformats.org/officeDocument/2006/relationships">
+  <p:cSld>
+    <p:spTree>
+      <p:nvGrpSpPr>
+        <p:cNvPr id="1" name=""/>
+        <p:cNvGrpSpPr/>
+        <p:nvPr/>
+      </p:nvGrpSpPr>
+      <p:grpSpPr/>
+      <p:sp>
+        <p:nvSpPr>
+          <p:cNvPr id="2" name="Rectangle 1"/>
+          <p:cNvSpPr/>
+          <p:nvPr/>
+        </p:nvSpPr>
+        <p:spPr>
+          <a:xfrm>
+            <a:off x="0" y="0"/>
+            <a:ext cx="12191695" cy="6858000"/>
+          </a:xfrm>
+          <a:prstGeom prst="rect">
+            <a:avLst/>
+          </a:prstGeom>
+          <a:solidFill>
+            <a:srgbClr val="0F172A"/>
+          </a:solidFill>
+          <a:ln>
+            <a:noFill/>
+          </a:ln>
+          <a:effectLst/>
+        </p:spPr>
+        <p:style>
+          <a:lnRef idx="1">
+            <a:schemeClr val="accent1"/>
+          </a:lnRef>
+          <a:fillRef idx="3">
+            <a:schemeClr val="accent1"/>
+          </a:fillRef>
+          <a:effectRef idx="2">
+            <a:schemeClr val="accent1"/>
+          </a:effectRef>
+          <a:fontRef idx="minor">
+            <a:schemeClr val="lt1"/>
+          </a:fontRef>
+        </p:style>
+        <p:txBody>
+          <a:bodyPr rtlCol="0" anchor="ctr"/>
+          <a:lstStyle/>
+          <a:p>
+            <a:pPr algn="ctr"/>
+          </a:p>
+        </p:txBody>
+      </p:sp>
+      <p:sp>
+        <p:nvSpPr>
+          <p:cNvPr id="3" name="TextBox 2"/>
+          <p:cNvSpPr txBox="1"/>
+          <p:nvPr/>
+        </p:nvSpPr>
+        <p:spPr>
+          <a:xfrm>
             <a:off x="1005840" y="2194560"/>
             <a:ext cx="10149840" cy="2743200"/>
           </a:xfrm>
@@ -4337,7 +4801,7 @@
               </a:defRPr>
             </a:pPr>
             <a:r>
-              <a:t>Merge key = schemaLabel + props.name</a:t>
+              <a:t>Merge key = schemaLabel, then + label, then + props.name — one field per zoom level</a:t>
             </a:r>
           </a:p>
         </p:txBody>
@@ -4488,7 +4952,7 @@
               </a:defRPr>
             </a:pPr>
             <a:r>
-              <a:t>What do we CALL it here?</a:t>
+              <a:t>Which ASPECT of it moves?</a:t>
             </a:r>
           </a:p>
         </p:txBody>
@@ -4527,7 +4991,7 @@
               </a:defRPr>
             </a:pPr>
             <a:r>
-              <a:t>free — for people</a:t>
+              <a:t>identity at variable level</a:t>
             </a:r>
           </a:p>
         </p:txBody>
@@ -4644,7 +5108,7 @@
               </a:defRPr>
             </a:pPr>
             <a:r>
-              <a:t>THE IDENTITY</a:t>
+              <a:t>IDENTITY AT EVERY LEVEL</a:t>
             </a:r>
           </a:p>
         </p:txBody>
@@ -4761,7 +5225,7 @@
               </a:defRPr>
             </a:pPr>
             <a:r>
-              <a:t>THE INSTANCE</a:t>
+              <a:t>identity at instance level</a:t>
             </a:r>
           </a:p>
         </p:txBody>
@@ -4917,7 +5381,7 @@
               </a:defRPr>
             </a:pPr>
             <a:r>
-              <a:t>A node can be renamed HOUSING or Housing or “the housing we have” without changing what it merges with.</a:t>
+              <a:t>At schema level and above the words are free. At variable level they ARE the identity.</a:t>
             </a:r>
           </a:p>
         </p:txBody>
@@ -4974,7 +5438,7 @@
               </a:defRPr>
             </a:pPr>
             <a:r>
-              <a:t>What it does</a:t>
+              <a:t>Four levels of the same drawing</a:t>
             </a:r>
           </a:p>
         </p:txBody>
@@ -5013,7 +5477,7 @@
               </a:defRPr>
             </a:pPr>
             <a:r>
-              <a:t>Beam</a:t>
+              <a:t>family — 8 nodes</a:t>
             </a:r>
           </a:p>
           <a:p>
@@ -5029,7 +5493,7 @@
               </a:defRPr>
             </a:pPr>
             <a:r>
-              <a:t>Every loaded subgraph, with a checkbox and its size. Tick to include.</a:t>
+              <a:t>The whole schema as eight blobs. Setting, Institution, Aim, Doing, Outcome, Issue, Resource, Person.</a:t>
             </a:r>
           </a:p>
           <a:p>
@@ -5045,7 +5509,7 @@
               </a:defRPr>
             </a:pPr>
             <a:r>
-              <a:t>Composite</a:t>
+              <a:t>schema — 24 nodes</a:t>
             </a:r>
           </a:p>
           <a:p>
@@ -5061,7 +5525,7 @@
               </a:defRPr>
             </a:pPr>
             <a:r>
-              <a:t>Merge the ticked ones. Shared nodes fuse; loops close across contributors.</a:t>
+              <a:t>The skeleton. Bare concepts: Action, Org, Person. What relates to what.</a:t>
             </a:r>
           </a:p>
           <a:p>
@@ -5077,7 +5541,7 @@
               </a:defRPr>
             </a:pPr>
             <a:r>
-              <a:t>Shared-node highlighting</a:t>
+              <a:t>variable — 25 nodes</a:t>
             </a:r>
           </a:p>
           <a:p>
@@ -5093,7 +5557,7 @@
               </a:defRPr>
             </a:pPr>
             <a:r>
-              <a:t>Unticked pieces light up when they overlap your selection — brighter the more they touch.</a:t>
+              <a:t>What actually moves: Effectiveness of ACTION. Signed links live only here.</a:t>
             </a:r>
           </a:p>
           <a:p>
@@ -5109,7 +5573,7 @@
               </a:defRPr>
             </a:pPr>
             <a:r>
-              <a:t>Bridge / Partition</a:t>
+              <a:t>instance</a:t>
             </a:r>
           </a:p>
           <a:p>
@@ -5125,7 +5589,39 @@
               </a:defRPr>
             </a:pPr>
             <a:r>
-              <a:t>Which piece would CONNECT two you have? And: split a composite back apart.</a:t>
+              <a:t>The particular case: Fix the Elm St culvert. Empty until you put real data in.</a:t>
+            </a:r>
+          </a:p>
+          <a:p>
+            <a:pPr>
+              <a:spcAft>
+                <a:spcPts val="400"/>
+              </a:spcAft>
+              <a:defRPr sz="2000" b="1">
+                <a:solidFill>
+                  <a:srgbClr val="334155"/>
+                </a:solidFill>
+                <a:latin typeface="Helvetica Neue"/>
+              </a:defRPr>
+            </a:pPr>
+            <a:r>
+              <a:t>The level IS the identity function</a:t>
+            </a:r>
+          </a:p>
+          <a:p>
+            <a:pPr>
+              <a:spcAft>
+                <a:spcPts val="1600"/>
+              </a:spcAft>
+              <a:defRPr sz="1500" b="0">
+                <a:solidFill>
+                  <a:srgbClr val="64748B"/>
+                </a:solidFill>
+                <a:latin typeface="Helvetica Neue"/>
+              </a:defRPr>
+            </a:pPr>
+            <a:r>
+              <a:t>Switching re-composites. A coarser view is a genuine contraction — each node an equivalence class of the level below.</a:t>
             </a:r>
           </a:p>
         </p:txBody>
@@ -5182,23 +5678,7 @@
               </a:defRPr>
             </a:pPr>
             <a:r>
-              <a:t>The highlight is a promise, not a hint</a:t>
-            </a:r>
-          </a:p>
-          <a:p>
-            <a:pPr>
-              <a:spcAft>
-                <a:spcPts val="0"/>
-              </a:spcAft>
-              <a:defRPr sz="1600" b="0">
-                <a:solidFill>
-                  <a:srgbClr val="64748B"/>
-                </a:solidFill>
-                <a:latin typeface="Helvetica Neue"/>
-              </a:defRPr>
-            </a:pPr>
-            <a:r>
-              <a:t>It uses the same key as the merge.</a:t>
+              <a:t>One meaning per channel</a:t>
             </a:r>
           </a:p>
         </p:txBody>
@@ -5237,7 +5717,7 @@
               </a:defRPr>
             </a:pPr>
             <a:r>
-              <a:t>A lit row means compositing it WILL fuse those nodes.</a:t>
+              <a:t>Node fill + ring = family</a:t>
             </a:r>
           </a:p>
           <a:p>
@@ -5253,7 +5733,7 @@
               </a:defRPr>
             </a:pPr>
             <a:r>
-              <a:t>Not “might be related.” Hover the badge and it names them.</a:t>
+              <a:t>The only property that survives the zoom unchanged, so it is the one colour is keyed to. Pale fill so black text always reads; the ring carries the hue that tells eight families apart.</a:t>
             </a:r>
           </a:p>
           <a:p>
@@ -5269,7 +5749,7 @@
               </a:defRPr>
             </a:pPr>
             <a:r>
-              <a:t>Select one subgraph → 4 light up. Add a second → 10. Add a third → 12.</a:t>
+              <a:t>Ring width = merge depth</a:t>
             </a:r>
           </a:p>
           <a:p>
@@ -5285,7 +5765,7 @@
               </a:defRPr>
             </a:pPr>
             <a:r>
-              <a:t>Overlap accumulates visibly as you tick.</a:t>
+              <a:t>How many subgraphs attest to that node. Thin means a single witness — with all 16 EIP aspects loaded, 10 of 24 concepts rest on one drawing.</a:t>
             </a:r>
           </a:p>
           <a:p>
@@ -5301,7 +5781,7 @@
               </a:defRPr>
             </a:pPr>
             <a:r>
-              <a:t>It stays dark when there is genuinely nothing.</a:t>
+              <a:t>+ and − at the arrowhead</a:t>
             </a:r>
           </a:p>
           <a:p>
@@ -5317,7 +5797,39 @@
               </a:defRPr>
             </a:pPr>
             <a:r>
-              <a:t>Which is what makes it worth trusting when it lights.</a:t>
+              <a:t>A glyph, not just a colour: sign carried by colour alone fails for colour blindness, greyscale print and a washed-out projector.</a:t>
+            </a:r>
+          </a:p>
+          <a:p>
+            <a:pPr>
+              <a:spcAft>
+                <a:spcPts val="400"/>
+              </a:spcAft>
+              <a:defRPr sz="2000" b="1">
+                <a:solidFill>
+                  <a:srgbClr val="334155"/>
+                </a:solidFill>
+                <a:latin typeface="Helvetica Neue"/>
+              </a:defRPr>
+            </a:pPr>
+            <a:r>
+              <a:t>Heavy dotted = unsigned</a:t>
+            </a:r>
+          </a:p>
+          <a:p>
+            <a:pPr>
+              <a:spcAft>
+                <a:spcPts val="1600"/>
+              </a:spcAft>
+              <a:defRPr sz="1500" b="0">
+                <a:solidFill>
+                  <a:srgbClr val="64748B"/>
+                </a:solidFill>
+                <a:latin typeface="Helvetica Neue"/>
+              </a:defRPr>
+            </a:pPr>
+            <a:r>
+              <a:t>No polarity recorded — which is NOT a claim that it is positive. Sign it and the weight drops away by itself.</a:t>
             </a:r>
           </a:p>
         </p:txBody>
@@ -5374,23 +5886,7 @@
               </a:defRPr>
             </a:pPr>
             <a:r>
-              <a:t>Worked example — the EIP schema</a:t>
-            </a:r>
-          </a:p>
-          <a:p>
-            <a:pPr>
-              <a:spcAft>
-                <a:spcPts val="0"/>
-              </a:spcAft>
-              <a:defRPr sz="1600" b="0">
-                <a:solidFill>
-                  <a:srgbClr val="64748B"/>
-                </a:solidFill>
-                <a:latin typeface="Helvetica Neue"/>
-              </a:defRPr>
-            </a:pPr>
-            <a:r>
-              <a:t>Sixteen curated aspect files. Two to eight nodes each.</a:t>
+              <a:t>What it does</a:t>
             </a:r>
           </a:p>
         </p:txBody>
@@ -5429,7 +5925,7 @@
               </a:defRPr>
             </a:pPr>
             <a:r>
-              <a:t>74 source nodes → 25 in the composite.</a:t>
+              <a:t>Beam</a:t>
             </a:r>
           </a:p>
           <a:p>
@@ -5445,7 +5941,7 @@
               </a:defRPr>
             </a:pPr>
             <a:r>
-              <a:t>Matching the whole-schema reference exactly. No duplicates. 49 recognised as repeats.</a:t>
+              <a:t>Every loaded subgraph, with a checkbox and its size. Tick to include.</a:t>
             </a:r>
           </a:p>
           <a:p>
@@ -5461,7 +5957,7 @@
               </a:defRPr>
             </a:pPr>
             <a:r>
-              <a:t>And it recovered what flattening had lost.</a:t>
+              <a:t>Composite</a:t>
             </a:r>
           </a:p>
           <a:p>
@@ -5477,7 +5973,7 @@
               </a:defRPr>
             </a:pPr>
             <a:r>
-              <a:t>Person–experience→Motivation. Place–support→Person. Conversation–for→Action.</a:t>
+              <a:t>Merge the ticked ones. Shared nodes fuse; loops close across contributors.</a:t>
             </a:r>
           </a:p>
           <a:p>
@@ -5493,7 +5989,7 @@
               </a:defRPr>
             </a:pPr>
             <a:r>
-              <a:t>Edge labels that had been fused came back apart.</a:t>
+              <a:t>Shared-node highlighting</a:t>
             </a:r>
           </a:p>
           <a:p>
@@ -5509,46 +6005,39 @@
               </a:defRPr>
             </a:pPr>
             <a:r>
-              <a:t>“create / stimulates” was two separate relations.</a:t>
-            </a:r>
-          </a:p>
-        </p:txBody>
-      </p:sp>
-      <p:sp>
-        <p:nvSpPr>
-          <p:cNvPr id="4" name="TextBox 3"/>
-          <p:cNvSpPr txBox="1"/>
-          <p:nvPr/>
-        </p:nvSpPr>
-        <p:spPr>
-          <a:xfrm>
-            <a:off x="822960" y="5989320"/>
-            <a:ext cx="10515600" cy="548640"/>
-          </a:xfrm>
-          <a:prstGeom prst="rect">
-            <a:avLst/>
-          </a:prstGeom>
-          <a:noFill/>
-        </p:spPr>
-        <p:txBody>
-          <a:bodyPr wrap="square">
-            <a:spAutoFit/>
-          </a:bodyPr>
-          <a:lstStyle/>
-          <a:p>
-            <a:pPr>
-              <a:spcAft>
-                <a:spcPts val="0"/>
-              </a:spcAft>
-              <a:defRPr sz="1300" b="1">
-                <a:solidFill>
-                  <a:srgbClr val="8A6A2E"/>
-                </a:solidFill>
-                <a:latin typeface="Helvetica Neue"/>
-              </a:defRPr>
-            </a:pPr>
-            <a:r>
-              <a:t>The subgraphs are the better source of truth.</a:t>
+              <a:t>Unticked pieces light up when they overlap your selection — brighter the more they touch.</a:t>
+            </a:r>
+          </a:p>
+          <a:p>
+            <a:pPr>
+              <a:spcAft>
+                <a:spcPts val="400"/>
+              </a:spcAft>
+              <a:defRPr sz="2000" b="1">
+                <a:solidFill>
+                  <a:srgbClr val="334155"/>
+                </a:solidFill>
+                <a:latin typeface="Helvetica Neue"/>
+              </a:defRPr>
+            </a:pPr>
+            <a:r>
+              <a:t>Bridge / Partition</a:t>
+            </a:r>
+          </a:p>
+          <a:p>
+            <a:pPr>
+              <a:spcAft>
+                <a:spcPts val="1600"/>
+              </a:spcAft>
+              <a:defRPr sz="1500" b="0">
+                <a:solidFill>
+                  <a:srgbClr val="64748B"/>
+                </a:solidFill>
+                <a:latin typeface="Helvetica Neue"/>
+              </a:defRPr>
+            </a:pPr>
+            <a:r>
+              <a:t>Which piece would CONNECT two you have? And: split a composite back apart.</a:t>
             </a:r>
           </a:p>
         </p:txBody>
@@ -5605,7 +6094,7 @@
               </a:defRPr>
             </a:pPr>
             <a:r>
-              <a:t>Where it came from</a:t>
+              <a:t>The highlight is a promise, not a hint</a:t>
             </a:r>
           </a:p>
           <a:p>
@@ -5621,7 +6110,7 @@
               </a:defRPr>
             </a:pPr>
             <a:r>
-              <a:t>Ward Cunningham's Solo Super Collaborator — public, live, and findable.</a:t>
+              <a:t>It uses the same key as the merge.</a:t>
             </a:r>
           </a:p>
         </p:txBody>
@@ -5660,7 +6149,7 @@
               </a:defRPr>
             </a:pPr>
             <a:r>
-              <a:t>wardcunningham.github.io/graph/graph.js</a:t>
+              <a:t>A lit row means compositing it WILL fuse those nodes.</a:t>
             </a:r>
           </a:p>
           <a:p>
@@ -5676,7 +6165,7 @@
               </a:defRPr>
             </a:pPr>
             <a:r>
-              <a:t>His Graph class. addUniqNode() carries the same merge rule. clusters() is our Partition.</a:t>
+              <a:t>Not “might be related.” Hover the badge and it names them.</a:t>
             </a:r>
           </a:p>
           <a:p>
@@ -5692,7 +6181,7 @@
               </a:defRPr>
             </a:pPr>
             <a:r>
-              <a:t>WardCunningham/assets · pages/mock-graph-data/</a:t>
+              <a:t>Select one subgraph → 4 light up. Add a second → 10. Add a third → 12.</a:t>
             </a:r>
           </a:p>
           <a:p>
@@ -5708,7 +6197,7 @@
               </a:defRPr>
             </a:pPr>
             <a:r>
-              <a:t>37 files. creator.html and composite.html are the originals.</a:t>
+              <a:t>Overlap accumulates visibly as you tick.</a:t>
             </a:r>
           </a:p>
           <a:p>
@@ -5724,7 +6213,7 @@
               </a:defRPr>
             </a:pPr>
             <a:r>
-              <a:t>paul90/wiki-plugin-solo</a:t>
+              <a:t>It stays dark when there is genuinely nothing.</a:t>
             </a:r>
           </a:p>
           <a:p>
@@ -5740,46 +6229,7 @@
               </a:defRPr>
             </a:pPr>
             <a:r>
-              <a:t>The solo item — the lineup popup the live pipeline posts into.</a:t>
-            </a:r>
-          </a:p>
-        </p:txBody>
-      </p:sp>
-      <p:sp>
-        <p:nvSpPr>
-          <p:cNvPr id="4" name="TextBox 3"/>
-          <p:cNvSpPr txBox="1"/>
-          <p:nvPr/>
-        </p:nvSpPr>
-        <p:spPr>
-          <a:xfrm>
-            <a:off x="822960" y="5989320"/>
-            <a:ext cx="10515600" cy="548640"/>
-          </a:xfrm>
-          <a:prstGeom prst="rect">
-            <a:avLst/>
-          </a:prstGeom>
-          <a:noFill/>
-        </p:spPr>
-        <p:txBody>
-          <a:bodyPr wrap="square">
-            <a:spAutoFit/>
-          </a:bodyPr>
-          <a:lstStyle/>
-          <a:p>
-            <a:pPr>
-              <a:spcAft>
-                <a:spcPts val="0"/>
-              </a:spcAft>
-              <a:defRPr sz="1300" b="1">
-                <a:solidFill>
-                  <a:srgbClr val="8A6A2E"/>
-                </a:solidFill>
-                <a:latin typeface="Helvetica Neue"/>
-              </a:defRPr>
-            </a:pPr>
-            <a:r>
-              <a:t>Not yet borrowed: Ward resolves names against the roster, binding identity to a real federated page.</a:t>
+              <a:t>Which is what makes it worth trusting when it lights.</a:t>
             </a:r>
           </a:p>
         </p:txBody>
